--- a/assets/pptx/catalog-56.pptx
+++ b/assets/pptx/catalog-56.pptx
@@ -3529,7 +3529,7 @@
                 <a:ea typeface="Ebrima"/>
                 <a:cs typeface="Ebrima"/>
               </a:rPr>
-              <a:t>ያድናል (8X)</a:t>
+              <a:t>ያድናል 8X</a:t>
             </a:r>
           </a:p>
         </p:txBody>
@@ -3686,7 +3686,7 @@
                 <a:ea typeface="Ebrima"/>
                 <a:cs typeface="Ebrima"/>
               </a:rPr>
-              <a:t>እንኳን ፊቱ ያለሁቱ (እንኳን ስሙን ያመንኩቱ)</a:t>
+              <a:t>እንኳን ፊቱ ያለሁቱ እንኳን ስሙን ያመንኩቱ</a:t>
             </a:r>
           </a:p>
           <a:p>
@@ -3807,7 +3807,7 @@
                 <a:ea typeface="Ebrima"/>
                 <a:cs typeface="Ebrima"/>
               </a:rPr>
-              <a:t>ፈውስን እንደ እንጀራ እንደ እንጀራ (2X)</a:t>
+              <a:t>ፈውስን እንደ እንጀራ እንደ እንጀራ 2X</a:t>
             </a:r>
           </a:p>
           <a:p>
@@ -4386,7 +4386,7 @@
                 <a:ea typeface="Ebrima"/>
                 <a:cs typeface="Ebrima"/>
               </a:rPr>
-              <a:t>ፍቅር መጥቷል መምህሩ (5X)</a:t>
+              <a:t>ፍቅር መጥቷል መምህሩ 5X</a:t>
             </a:r>
           </a:p>
         </p:txBody>
